--- a/docs/presentaciones/classes/clase-071-regresion-polinomial-presentacion.pptx
+++ b/docs/presentaciones/classes/clase-071-regresion-polinomial-presentacion.pptx
@@ -4933,7 +4933,7 @@
                 </a:solidFill>
                 <a:latin typeface="Segoe UI"/>
               </a:rPr>
-              <a:t>Primer bloque ejecutable del notebook.</a:t>
+              <a:t>$y = 0.5x^2 + x + 2 + \text{ruido}$, con $x\in[-3, 3]$ y $n=100$.</a:t>
             </a:r>
           </a:p>
         </p:txBody>
@@ -5020,7 +5020,235 @@
                 </a:solidFill>
                 <a:latin typeface="Courier New"/>
               </a:rPr>
-              <a:t># Imports y configuración inicial</a:t>
+              <a:t>import numpy as np</a:t>
+            </a:r>
+          </a:p>
+          <a:p>
+            <a:pPr>
+              <a:defRPr sz="1200" b="0">
+                <a:solidFill>
+                  <a:srgbClr val="F8FAFC"/>
+                </a:solidFill>
+                <a:latin typeface="Courier New"/>
+              </a:defRPr>
+            </a:pPr>
+            <a:r>
+              <a:rPr sz="1200" b="0">
+                <a:solidFill>
+                  <a:srgbClr val="F8FAFC"/>
+                </a:solidFill>
+                <a:latin typeface="Courier New"/>
+              </a:rPr>
+              <a:t>import matplotlib.pyplot as plt</a:t>
+            </a:r>
+          </a:p>
+          <a:p>
+            <a:pPr>
+              <a:defRPr sz="1200" b="0">
+                <a:solidFill>
+                  <a:srgbClr val="F8FAFC"/>
+                </a:solidFill>
+                <a:latin typeface="Courier New"/>
+              </a:defRPr>
+            </a:pPr>
+            <a:r>
+              <a:rPr sz="1200" b="0">
+                <a:solidFill>
+                  <a:srgbClr val="F8FAFC"/>
+                </a:solidFill>
+                <a:latin typeface="Courier New"/>
+              </a:rPr>
+              <a:t> </a:t>
+            </a:r>
+          </a:p>
+          <a:p>
+            <a:pPr>
+              <a:defRPr sz="1200" b="0">
+                <a:solidFill>
+                  <a:srgbClr val="F8FAFC"/>
+                </a:solidFill>
+                <a:latin typeface="Courier New"/>
+              </a:defRPr>
+            </a:pPr>
+            <a:r>
+              <a:rPr sz="1200" b="0">
+                <a:solidFill>
+                  <a:srgbClr val="F8FAFC"/>
+                </a:solidFill>
+                <a:latin typeface="Courier New"/>
+              </a:rPr>
+              <a:t>np.random.seed(42)</a:t>
+            </a:r>
+          </a:p>
+          <a:p>
+            <a:pPr>
+              <a:defRPr sz="1200" b="0">
+                <a:solidFill>
+                  <a:srgbClr val="F8FAFC"/>
+                </a:solidFill>
+                <a:latin typeface="Courier New"/>
+              </a:defRPr>
+            </a:pPr>
+            <a:r>
+              <a:rPr sz="1200" b="0">
+                <a:solidFill>
+                  <a:srgbClr val="F8FAFC"/>
+                </a:solidFill>
+                <a:latin typeface="Courier New"/>
+              </a:rPr>
+              <a:t>m = 100</a:t>
+            </a:r>
+          </a:p>
+          <a:p>
+            <a:pPr>
+              <a:defRPr sz="1200" b="0">
+                <a:solidFill>
+                  <a:srgbClr val="F8FAFC"/>
+                </a:solidFill>
+                <a:latin typeface="Courier New"/>
+              </a:defRPr>
+            </a:pPr>
+            <a:r>
+              <a:rPr sz="1200" b="0">
+                <a:solidFill>
+                  <a:srgbClr val="F8FAFC"/>
+                </a:solidFill>
+                <a:latin typeface="Courier New"/>
+              </a:rPr>
+              <a:t>X = 6 * np.random.rand(m, 1) - 3</a:t>
+            </a:r>
+          </a:p>
+          <a:p>
+            <a:pPr>
+              <a:defRPr sz="1200" b="0">
+                <a:solidFill>
+                  <a:srgbClr val="F8FAFC"/>
+                </a:solidFill>
+                <a:latin typeface="Courier New"/>
+              </a:defRPr>
+            </a:pPr>
+            <a:r>
+              <a:rPr sz="1200" b="0">
+                <a:solidFill>
+                  <a:srgbClr val="F8FAFC"/>
+                </a:solidFill>
+                <a:latin typeface="Courier New"/>
+              </a:rPr>
+              <a:t>y = 0.5 * X[:, 0]**2 + X[:, 0] + 2 + np.random.randn(m)   # DGP: 0.5x²+x+2+ruido</a:t>
+            </a:r>
+          </a:p>
+          <a:p>
+            <a:pPr>
+              <a:defRPr sz="1200" b="0">
+                <a:solidFill>
+                  <a:srgbClr val="F8FAFC"/>
+                </a:solidFill>
+                <a:latin typeface="Courier New"/>
+              </a:defRPr>
+            </a:pPr>
+            <a:r>
+              <a:rPr sz="1200" b="0">
+                <a:solidFill>
+                  <a:srgbClr val="F8FAFC"/>
+                </a:solidFill>
+                <a:latin typeface="Courier New"/>
+              </a:rPr>
+              <a:t> </a:t>
+            </a:r>
+          </a:p>
+          <a:p>
+            <a:pPr>
+              <a:defRPr sz="1200" b="0">
+                <a:solidFill>
+                  <a:srgbClr val="F8FAFC"/>
+                </a:solidFill>
+                <a:latin typeface="Courier New"/>
+              </a:defRPr>
+            </a:pPr>
+            <a:r>
+              <a:rPr sz="1200" b="0">
+                <a:solidFill>
+                  <a:srgbClr val="F8FAFC"/>
+                </a:solidFill>
+                <a:latin typeface="Courier New"/>
+              </a:rPr>
+              <a:t>fig, ax = plt.subplots(figsize=(7, 4))</a:t>
+            </a:r>
+          </a:p>
+          <a:p>
+            <a:pPr>
+              <a:defRPr sz="1200" b="0">
+                <a:solidFill>
+                  <a:srgbClr val="F8FAFC"/>
+                </a:solidFill>
+                <a:latin typeface="Courier New"/>
+              </a:defRPr>
+            </a:pPr>
+            <a:r>
+              <a:rPr sz="1200" b="0">
+                <a:solidFill>
+                  <a:srgbClr val="F8FAFC"/>
+                </a:solidFill>
+                <a:latin typeface="Courier New"/>
+              </a:rPr>
+              <a:t>ax.scatter(X, y, s=15, alpha=0.7)</a:t>
+            </a:r>
+          </a:p>
+          <a:p>
+            <a:pPr>
+              <a:defRPr sz="1200" b="0">
+                <a:solidFill>
+                  <a:srgbClr val="F8FAFC"/>
+                </a:solidFill>
+                <a:latin typeface="Courier New"/>
+              </a:defRPr>
+            </a:pPr>
+            <a:r>
+              <a:rPr sz="1200" b="0">
+                <a:solidFill>
+                  <a:srgbClr val="F8FAFC"/>
+                </a:solidFill>
+                <a:latin typeface="Courier New"/>
+              </a:rPr>
+              <a:t>ax.set_xlabel('x'); ax.set_ylabel('y'); ax.set_title('Dataset cuadrático ruidoso')</a:t>
+            </a:r>
+          </a:p>
+          <a:p>
+            <a:pPr>
+              <a:defRPr sz="1200" b="0">
+                <a:solidFill>
+                  <a:srgbClr val="F8FAFC"/>
+                </a:solidFill>
+                <a:latin typeface="Courier New"/>
+              </a:defRPr>
+            </a:pPr>
+            <a:r>
+              <a:rPr sz="1200" b="0">
+                <a:solidFill>
+                  <a:srgbClr val="F8FAFC"/>
+                </a:solidFill>
+                <a:latin typeface="Courier New"/>
+              </a:rPr>
+              <a:t>plt.tight_layout(); plt.show()</a:t>
+            </a:r>
+          </a:p>
+          <a:p>
+            <a:pPr>
+              <a:defRPr sz="1200" b="0">
+                <a:solidFill>
+                  <a:srgbClr val="F8FAFC"/>
+                </a:solidFill>
+                <a:latin typeface="Courier New"/>
+              </a:defRPr>
+            </a:pPr>
+            <a:r>
+              <a:rPr sz="1200" b="0">
+                <a:solidFill>
+                  <a:srgbClr val="F8FAFC"/>
+                </a:solidFill>
+                <a:latin typeface="Courier New"/>
+              </a:rPr>
+              <a:t>print('X', X.shape, '| y', y.shape)</a:t>
             </a:r>
           </a:p>
         </p:txBody>

--- a/docs/presentaciones/classes/clase-071-regresion-polinomial-presentacion.pptx
+++ b/docs/presentaciones/classes/clase-071-regresion-polinomial-presentacion.pptx
@@ -3272,7 +3272,7 @@
                 </a:solidFill>
                 <a:latin typeface="Segoe UI"/>
               </a:rPr>
-              <a:t>Parte: 1 — Machine Learning Clásico · Fuente: Géron, cap. 4 § Polynomial Regression.  Duración estimada: 50 min.</a:t>
+              <a:t>Parte: 1 — Machine Learning Clásico · Fuente: Géron, cap. 4 § Polynomial Regression.  Duración estimada: 50 min. · Nivel: Intermedio</a:t>
             </a:r>
           </a:p>
         </p:txBody>
@@ -3581,7 +3581,7 @@
                 </a:solidFill>
                 <a:latin typeface="Segoe UI"/>
               </a:rPr>
-              <a:t>Parte: 1 — Machine Learning Clásico · Fuente: Géron, cap. 4 § Polynomial Regression.  Duración estimada: 50 min.</a:t>
+              <a:t>Parte: 1 — Machine Learning Clásico · Fuente: Géron, cap. 4 § Polynomial Regression.  Duración estimada: 50 min. · Nivel: Intermedio</a:t>
             </a:r>
           </a:p>
         </p:txBody>
